--- a/clase_04_datos_sensores/slides/slides_clase04_intermedio_enriquecido.pptx
+++ b/clase_04_datos_sensores/slides/slides_clase04_intermedio_enriquecido.pptx
@@ -3102,14 +3102,14 @@
       <p:grpSpPr/>
       <p:pic>
         <p:nvPicPr>
-          <p:cNvPr id="2" name="Picture 1" descr="cover_bg.png"/>
+          <p:cNvPr id="8" name="Picture 7" descr="cover_bg.png"/>
           <p:cNvPicPr>
             <a:picLocks noChangeAspect="1"/>
           </p:cNvPicPr>
           <p:nvPr/>
         </p:nvPicPr>
         <p:blipFill>
-          <a:blip r:embed="rId5"/>
+          <a:blip r:embed="rId6"/>
           <a:stretch>
             <a:fillRect/>
           </a:stretch>
